--- a/chapter3/parts/part-05-privacy-preserving-techniques/clip.pptx
+++ b/chapter3/parts/part-05-privacy-preserving-techniques/clip.pptx
@@ -4384,7 +4384,7 @@
               </a:defRPr>
             </a:pPr>
             <a:r>
-              <a:t>Chapter 3 — 05 Privacy Preserving Techniques</a:t>
+              <a:t>Chapter 3 — Privacy Preserving Techniques</a:t>
             </a:r>
           </a:p>
         </p:txBody>
@@ -4583,7 +4583,7 @@
               </a:defRPr>
             </a:pPr>
             <a:r>
-              <a:t>Chapter 3 — 05 Privacy Preserving Techniques</a:t>
+              <a:t>Chapter 3 — Privacy Preserving Techniques</a:t>
             </a:r>
           </a:p>
         </p:txBody>
@@ -4762,7 +4762,7 @@
               </a:defRPr>
             </a:pPr>
             <a:r>
-              <a:t>Chapter 3 — 05 Privacy Preserving Techniques</a:t>
+              <a:t>Chapter 3 — Privacy Preserving Techniques</a:t>
             </a:r>
           </a:p>
         </p:txBody>
@@ -4921,7 +4921,7 @@
               </a:defRPr>
             </a:pPr>
             <a:r>
-              <a:t>Chapter 3 — 05 Privacy Preserving Techniques</a:t>
+              <a:t>Chapter 3 — Privacy Preserving Techniques</a:t>
             </a:r>
           </a:p>
         </p:txBody>
@@ -5080,7 +5080,7 @@
               </a:defRPr>
             </a:pPr>
             <a:r>
-              <a:t>Chapter 3 — 05 Privacy Preserving Techniques</a:t>
+              <a:t>Chapter 3 — Privacy Preserving Techniques</a:t>
             </a:r>
           </a:p>
         </p:txBody>
@@ -5279,7 +5279,7 @@
               </a:defRPr>
             </a:pPr>
             <a:r>
-              <a:t>Chapter 3 — 05 Privacy Preserving Techniques</a:t>
+              <a:t>Chapter 3 — Privacy Preserving Techniques</a:t>
             </a:r>
           </a:p>
         </p:txBody>
@@ -5458,7 +5458,7 @@
               </a:defRPr>
             </a:pPr>
             <a:r>
-              <a:t>Chapter 3 — 05 Privacy Preserving Techniques</a:t>
+              <a:t>Chapter 3 — Privacy Preserving Techniques</a:t>
             </a:r>
           </a:p>
         </p:txBody>
@@ -5657,7 +5657,7 @@
               </a:defRPr>
             </a:pPr>
             <a:r>
-              <a:t>Chapter 3 — 05 Privacy Preserving Techniques</a:t>
+              <a:t>Chapter 3 — Privacy Preserving Techniques</a:t>
             </a:r>
           </a:p>
         </p:txBody>
@@ -5836,7 +5836,7 @@
               </a:defRPr>
             </a:pPr>
             <a:r>
-              <a:t>Chapter 3 — 05 Privacy Preserving Techniques</a:t>
+              <a:t>Chapter 3 — Privacy Preserving Techniques</a:t>
             </a:r>
           </a:p>
         </p:txBody>
@@ -6015,7 +6015,7 @@
               </a:defRPr>
             </a:pPr>
             <a:r>
-              <a:t>Chapter 3 — 05 Privacy Preserving Techniques</a:t>
+              <a:t>Chapter 3 — Privacy Preserving Techniques</a:t>
             </a:r>
           </a:p>
         </p:txBody>
@@ -6214,7 +6214,7 @@
               </a:defRPr>
             </a:pPr>
             <a:r>
-              <a:t>Chapter 3 — 05 Privacy Preserving Techniques</a:t>
+              <a:t>Chapter 3 — Privacy Preserving Techniques</a:t>
             </a:r>
           </a:p>
         </p:txBody>
@@ -6373,7 +6373,7 @@
               </a:defRPr>
             </a:pPr>
             <a:r>
-              <a:t>Chapter 3 — 05 Privacy Preserving Techniques</a:t>
+              <a:t>Chapter 3 — Privacy Preserving Techniques</a:t>
             </a:r>
           </a:p>
         </p:txBody>

--- a/chapter3/parts/part-05-privacy-preserving-techniques/clip.pptx
+++ b/chapter3/parts/part-05-privacy-preserving-techniques/clip.pptx
@@ -4468,10 +4468,12 @@
           </a:bodyPr>
           <a:lstStyle/>
           <a:p>
-            <a:pPr>
+            <a:pPr lvl="0" marL="457200" indent="-228600">
+              <a:buFont typeface="Calibri"/>
               <a:spcAft>
                 <a:spcPts val="1000"/>
               </a:spcAft>
+              <a:buSzPct val="100000"/>
               <a:buChar char="•"/>
               <a:lnSpc>
                 <a:spcPts val="2200"/>
@@ -4488,10 +4490,12 @@
             </a:r>
           </a:p>
           <a:p>
-            <a:pPr>
+            <a:pPr lvl="0" marL="457200" indent="-228600">
+              <a:buFont typeface="Calibri"/>
               <a:spcAft>
                 <a:spcPts val="1000"/>
               </a:spcAft>
+              <a:buSzPct val="100000"/>
               <a:buChar char="•"/>
               <a:lnSpc>
                 <a:spcPts val="2200"/>
@@ -4508,10 +4512,12 @@
             </a:r>
           </a:p>
           <a:p>
-            <a:pPr>
+            <a:pPr lvl="0" marL="457200" indent="-228600">
+              <a:buFont typeface="Calibri"/>
               <a:spcAft>
                 <a:spcPts val="1000"/>
               </a:spcAft>
+              <a:buSzPct val="100000"/>
               <a:buChar char="•"/>
               <a:lnSpc>
                 <a:spcPts val="2200"/>
@@ -4528,10 +4534,12 @@
             </a:r>
           </a:p>
           <a:p>
-            <a:pPr>
+            <a:pPr lvl="0" marL="457200" indent="-228600">
+              <a:buFont typeface="Calibri"/>
               <a:spcAft>
                 <a:spcPts val="1000"/>
               </a:spcAft>
+              <a:buSzPct val="100000"/>
               <a:buChar char="•"/>
               <a:lnSpc>
                 <a:spcPts val="2200"/>
@@ -4667,10 +4675,12 @@
           </a:bodyPr>
           <a:lstStyle/>
           <a:p>
-            <a:pPr>
+            <a:pPr lvl="0" marL="457200" indent="-228600">
+              <a:buFont typeface="Calibri"/>
               <a:spcAft>
                 <a:spcPts val="1000"/>
               </a:spcAft>
+              <a:buSzPct val="100000"/>
               <a:buChar char="•"/>
               <a:lnSpc>
                 <a:spcPts val="2200"/>
@@ -4687,10 +4697,12 @@
             </a:r>
           </a:p>
           <a:p>
-            <a:pPr>
+            <a:pPr lvl="0" marL="457200" indent="-228600">
+              <a:buFont typeface="Calibri"/>
               <a:spcAft>
                 <a:spcPts val="1000"/>
               </a:spcAft>
+              <a:buSzPct val="100000"/>
               <a:buChar char="•"/>
               <a:lnSpc>
                 <a:spcPts val="2200"/>
@@ -4707,10 +4719,12 @@
             </a:r>
           </a:p>
           <a:p>
-            <a:pPr>
+            <a:pPr lvl="0" marL="457200" indent="-228600">
+              <a:buFont typeface="Calibri"/>
               <a:spcAft>
                 <a:spcPts val="1000"/>
               </a:spcAft>
+              <a:buSzPct val="100000"/>
               <a:buChar char="•"/>
               <a:lnSpc>
                 <a:spcPts val="2200"/>
@@ -4846,10 +4860,12 @@
           </a:bodyPr>
           <a:lstStyle/>
           <a:p>
-            <a:pPr>
+            <a:pPr lvl="0" marL="457200" indent="-228600">
+              <a:buFont typeface="Calibri"/>
               <a:spcAft>
                 <a:spcPts val="1000"/>
               </a:spcAft>
+              <a:buSzPct val="100000"/>
               <a:buChar char="•"/>
               <a:lnSpc>
                 <a:spcPts val="2200"/>
@@ -4866,10 +4882,12 @@
             </a:r>
           </a:p>
           <a:p>
-            <a:pPr>
+            <a:pPr lvl="0" marL="457200" indent="-228600">
+              <a:buFont typeface="Calibri"/>
               <a:spcAft>
                 <a:spcPts val="1000"/>
               </a:spcAft>
+              <a:buSzPct val="100000"/>
               <a:buChar char="•"/>
               <a:lnSpc>
                 <a:spcPts val="2200"/>
@@ -5005,10 +5023,12 @@
           </a:bodyPr>
           <a:lstStyle/>
           <a:p>
-            <a:pPr>
+            <a:pPr lvl="0" marL="457200" indent="-228600">
+              <a:buFont typeface="Calibri"/>
               <a:spcAft>
                 <a:spcPts val="1000"/>
               </a:spcAft>
+              <a:buSzPct val="100000"/>
               <a:buChar char="•"/>
               <a:lnSpc>
                 <a:spcPts val="2200"/>
@@ -5025,10 +5045,12 @@
             </a:r>
           </a:p>
           <a:p>
-            <a:pPr>
+            <a:pPr lvl="0" marL="457200" indent="-228600">
+              <a:buFont typeface="Calibri"/>
               <a:spcAft>
                 <a:spcPts val="1000"/>
               </a:spcAft>
+              <a:buSzPct val="100000"/>
               <a:buChar char="•"/>
               <a:lnSpc>
                 <a:spcPts val="2200"/>
@@ -5164,10 +5186,12 @@
           </a:bodyPr>
           <a:lstStyle/>
           <a:p>
-            <a:pPr>
+            <a:pPr lvl="0" marL="457200" indent="-228600">
+              <a:buFont typeface="Calibri"/>
               <a:spcAft>
                 <a:spcPts val="1000"/>
               </a:spcAft>
+              <a:buSzPct val="100000"/>
               <a:buChar char="•"/>
               <a:lnSpc>
                 <a:spcPts val="2200"/>
@@ -5184,10 +5208,12 @@
             </a:r>
           </a:p>
           <a:p>
-            <a:pPr>
+            <a:pPr lvl="0" marL="457200" indent="-228600">
+              <a:buFont typeface="Calibri"/>
               <a:spcAft>
                 <a:spcPts val="1000"/>
               </a:spcAft>
+              <a:buSzPct val="100000"/>
               <a:buChar char="•"/>
               <a:lnSpc>
                 <a:spcPts val="2200"/>
@@ -5204,10 +5230,12 @@
             </a:r>
           </a:p>
           <a:p>
-            <a:pPr>
+            <a:pPr lvl="0" marL="457200" indent="-228600">
+              <a:buFont typeface="Calibri"/>
               <a:spcAft>
                 <a:spcPts val="1000"/>
               </a:spcAft>
+              <a:buSzPct val="100000"/>
               <a:buChar char="•"/>
               <a:lnSpc>
                 <a:spcPts val="2200"/>
@@ -5224,10 +5252,12 @@
             </a:r>
           </a:p>
           <a:p>
-            <a:pPr>
+            <a:pPr lvl="0" marL="457200" indent="-228600">
+              <a:buFont typeface="Calibri"/>
               <a:spcAft>
                 <a:spcPts val="1000"/>
               </a:spcAft>
+              <a:buSzPct val="100000"/>
               <a:buChar char="•"/>
               <a:lnSpc>
                 <a:spcPts val="2200"/>
@@ -5363,10 +5393,12 @@
           </a:bodyPr>
           <a:lstStyle/>
           <a:p>
-            <a:pPr>
+            <a:pPr lvl="0" marL="457200" indent="-228600">
+              <a:buFont typeface="Calibri"/>
               <a:spcAft>
                 <a:spcPts val="1000"/>
               </a:spcAft>
+              <a:buSzPct val="100000"/>
               <a:buChar char="•"/>
               <a:lnSpc>
                 <a:spcPts val="2200"/>
@@ -5383,10 +5415,12 @@
             </a:r>
           </a:p>
           <a:p>
-            <a:pPr>
+            <a:pPr lvl="0" marL="457200" indent="-228600">
+              <a:buFont typeface="Calibri"/>
               <a:spcAft>
                 <a:spcPts val="1000"/>
               </a:spcAft>
+              <a:buSzPct val="100000"/>
               <a:buChar char="•"/>
               <a:lnSpc>
                 <a:spcPts val="2200"/>
@@ -5403,10 +5437,12 @@
             </a:r>
           </a:p>
           <a:p>
-            <a:pPr>
+            <a:pPr lvl="0" marL="457200" indent="-228600">
+              <a:buFont typeface="Calibri"/>
               <a:spcAft>
                 <a:spcPts val="1000"/>
               </a:spcAft>
+              <a:buSzPct val="100000"/>
               <a:buChar char="•"/>
               <a:lnSpc>
                 <a:spcPts val="2200"/>
@@ -5542,10 +5578,12 @@
           </a:bodyPr>
           <a:lstStyle/>
           <a:p>
-            <a:pPr>
+            <a:pPr lvl="0" marL="457200" indent="-228600">
+              <a:buFont typeface="Calibri"/>
               <a:spcAft>
                 <a:spcPts val="1000"/>
               </a:spcAft>
+              <a:buSzPct val="100000"/>
               <a:buChar char="•"/>
               <a:lnSpc>
                 <a:spcPts val="2200"/>
@@ -5562,10 +5600,12 @@
             </a:r>
           </a:p>
           <a:p>
-            <a:pPr>
+            <a:pPr lvl="0" marL="457200" indent="-228600">
+              <a:buFont typeface="Calibri"/>
               <a:spcAft>
                 <a:spcPts val="1000"/>
               </a:spcAft>
+              <a:buSzPct val="100000"/>
               <a:buChar char="•"/>
               <a:lnSpc>
                 <a:spcPts val="2200"/>
@@ -5582,10 +5622,12 @@
             </a:r>
           </a:p>
           <a:p>
-            <a:pPr>
+            <a:pPr lvl="0" marL="457200" indent="-228600">
+              <a:buFont typeface="Calibri"/>
               <a:spcAft>
                 <a:spcPts val="1000"/>
               </a:spcAft>
+              <a:buSzPct val="100000"/>
               <a:buChar char="•"/>
               <a:lnSpc>
                 <a:spcPts val="2200"/>
@@ -5602,10 +5644,12 @@
             </a:r>
           </a:p>
           <a:p>
-            <a:pPr>
+            <a:pPr lvl="0" marL="457200" indent="-228600">
+              <a:buFont typeface="Calibri"/>
               <a:spcAft>
                 <a:spcPts val="1000"/>
               </a:spcAft>
+              <a:buSzPct val="100000"/>
               <a:buChar char="•"/>
               <a:lnSpc>
                 <a:spcPts val="2200"/>
@@ -5741,10 +5785,12 @@
           </a:bodyPr>
           <a:lstStyle/>
           <a:p>
-            <a:pPr>
+            <a:pPr lvl="0" marL="457200" indent="-228600">
+              <a:buFont typeface="Calibri"/>
               <a:spcAft>
                 <a:spcPts val="1000"/>
               </a:spcAft>
+              <a:buSzPct val="100000"/>
               <a:buChar char="•"/>
               <a:lnSpc>
                 <a:spcPts val="2200"/>
@@ -5761,10 +5807,12 @@
             </a:r>
           </a:p>
           <a:p>
-            <a:pPr>
+            <a:pPr lvl="0" marL="457200" indent="-228600">
+              <a:buFont typeface="Calibri"/>
               <a:spcAft>
                 <a:spcPts val="1000"/>
               </a:spcAft>
+              <a:buSzPct val="100000"/>
               <a:buChar char="•"/>
               <a:lnSpc>
                 <a:spcPts val="2200"/>
@@ -5781,10 +5829,12 @@
             </a:r>
           </a:p>
           <a:p>
-            <a:pPr>
+            <a:pPr lvl="0" marL="457200" indent="-228600">
+              <a:buFont typeface="Calibri"/>
               <a:spcAft>
                 <a:spcPts val="1000"/>
               </a:spcAft>
+              <a:buSzPct val="100000"/>
               <a:buChar char="•"/>
               <a:lnSpc>
                 <a:spcPts val="2200"/>
@@ -5920,10 +5970,12 @@
           </a:bodyPr>
           <a:lstStyle/>
           <a:p>
-            <a:pPr>
+            <a:pPr lvl="0" marL="457200" indent="-228600">
+              <a:buFont typeface="Calibri"/>
               <a:spcAft>
                 <a:spcPts val="1000"/>
               </a:spcAft>
+              <a:buSzPct val="100000"/>
               <a:buChar char="•"/>
               <a:lnSpc>
                 <a:spcPts val="2200"/>
@@ -5940,10 +5992,12 @@
             </a:r>
           </a:p>
           <a:p>
-            <a:pPr>
+            <a:pPr lvl="0" marL="457200" indent="-228600">
+              <a:buFont typeface="Calibri"/>
               <a:spcAft>
                 <a:spcPts val="1000"/>
               </a:spcAft>
+              <a:buSzPct val="100000"/>
               <a:buChar char="•"/>
               <a:lnSpc>
                 <a:spcPts val="2200"/>
@@ -5960,10 +6014,12 @@
             </a:r>
           </a:p>
           <a:p>
-            <a:pPr>
+            <a:pPr lvl="0" marL="457200" indent="-228600">
+              <a:buFont typeface="Calibri"/>
               <a:spcAft>
                 <a:spcPts val="1000"/>
               </a:spcAft>
+              <a:buSzPct val="100000"/>
               <a:buChar char="•"/>
               <a:lnSpc>
                 <a:spcPts val="2200"/>
@@ -6099,10 +6155,12 @@
           </a:bodyPr>
           <a:lstStyle/>
           <a:p>
-            <a:pPr>
+            <a:pPr lvl="0" marL="457200" indent="-228600">
+              <a:buFont typeface="Calibri"/>
               <a:spcAft>
                 <a:spcPts val="1000"/>
               </a:spcAft>
+              <a:buSzPct val="100000"/>
               <a:buChar char="•"/>
               <a:lnSpc>
                 <a:spcPts val="2200"/>
@@ -6119,10 +6177,12 @@
             </a:r>
           </a:p>
           <a:p>
-            <a:pPr>
+            <a:pPr lvl="0" marL="457200" indent="-228600">
+              <a:buFont typeface="Calibri"/>
               <a:spcAft>
                 <a:spcPts val="1000"/>
               </a:spcAft>
+              <a:buSzPct val="100000"/>
               <a:buChar char="•"/>
               <a:lnSpc>
                 <a:spcPts val="2200"/>
@@ -6139,10 +6199,12 @@
             </a:r>
           </a:p>
           <a:p>
-            <a:pPr>
+            <a:pPr lvl="0" marL="457200" indent="-228600">
+              <a:buFont typeface="Calibri"/>
               <a:spcAft>
                 <a:spcPts val="1000"/>
               </a:spcAft>
+              <a:buSzPct val="100000"/>
               <a:buChar char="•"/>
               <a:lnSpc>
                 <a:spcPts val="2200"/>
@@ -6159,10 +6221,12 @@
             </a:r>
           </a:p>
           <a:p>
-            <a:pPr>
+            <a:pPr lvl="0" marL="457200" indent="-228600">
+              <a:buFont typeface="Calibri"/>
               <a:spcAft>
                 <a:spcPts val="1000"/>
               </a:spcAft>
+              <a:buSzPct val="100000"/>
               <a:buChar char="•"/>
               <a:lnSpc>
                 <a:spcPts val="2200"/>
@@ -6298,10 +6362,12 @@
           </a:bodyPr>
           <a:lstStyle/>
           <a:p>
-            <a:pPr>
+            <a:pPr lvl="0" marL="457200" indent="-228600">
+              <a:buFont typeface="Calibri"/>
               <a:spcAft>
                 <a:spcPts val="1000"/>
               </a:spcAft>
+              <a:buSzPct val="100000"/>
               <a:buChar char="•"/>
               <a:lnSpc>
                 <a:spcPts val="2200"/>
@@ -6318,10 +6384,12 @@
             </a:r>
           </a:p>
           <a:p>
-            <a:pPr>
+            <a:pPr lvl="0" marL="457200" indent="-228600">
+              <a:buFont typeface="Calibri"/>
               <a:spcAft>
                 <a:spcPts val="1000"/>
               </a:spcAft>
+              <a:buSzPct val="100000"/>
               <a:buChar char="•"/>
               <a:lnSpc>
                 <a:spcPts val="2200"/>
